--- a/UrbanCart_Churn_Prediction.pptx
+++ b/UrbanCart_Churn_Prediction.pptx
@@ -1611,7 +1611,7 @@
               <a:buNone/>
             </a:pPr>
             <a:r>
-              <a:rPr lang="en-US" sz="1600" dirty="0">
+              <a:rPr lang="en-US" sz="2000" dirty="0">
                 <a:solidFill>
                   <a:srgbClr val="8B96C9"/>
                 </a:solidFill>
@@ -1622,7 +1622,7 @@
               <a:t>Obinna Muonanu | </a:t>
             </a:r>
             <a:r>
-              <a:rPr lang="en-US" sz="1600" dirty="0" err="1">
+              <a:rPr lang="en-US" sz="2000" dirty="0" err="1">
                 <a:solidFill>
                   <a:srgbClr val="8B96C9"/>
                 </a:solidFill>
@@ -1633,7 +1633,7 @@
               <a:t>TeSA</a:t>
             </a:r>
             <a:r>
-              <a:rPr lang="en-US" sz="1600" dirty="0">
+              <a:rPr lang="en-US" sz="2000" dirty="0">
                 <a:solidFill>
                   <a:srgbClr val="8B96C9"/>
                 </a:solidFill>
@@ -1643,7 +1643,7 @@
               </a:rPr>
               <a:t> AI Specialization</a:t>
             </a:r>
-            <a:endParaRPr lang="en-US" sz="1600" dirty="0">
+            <a:endParaRPr lang="en-US" sz="2000" dirty="0">
               <a:latin typeface="Gill Sans MT" panose="020B0502020104020203" pitchFamily="34" charset="0"/>
             </a:endParaRPr>
           </a:p>
